--- a/docs/261002_개인연구미팅자료.pptx
+++ b/docs/261002_개인연구미팅자료.pptx
@@ -5,7 +5,7 @@
     <p:sldMasterId id="2147483648" r:id="rId1"/>
   </p:sldMasterIdLst>
   <p:notesMasterIdLst>
-    <p:notesMasterId r:id="rId26"/>
+    <p:notesMasterId r:id="rId24"/>
   </p:notesMasterIdLst>
   <p:sldIdLst>
     <p:sldId id="256" r:id="rId2"/>
@@ -22,30 +22,25 @@
     <p:sldId id="270" r:id="rId13"/>
     <p:sldId id="268" r:id="rId14"/>
     <p:sldId id="487" r:id="rId15"/>
-    <p:sldId id="277" r:id="rId17"/>
-    <p:sldId id="498" r:id="rId22"/>
+    <p:sldId id="277" r:id="rId16"/>
+    <p:sldId id="498" r:id="rId17"/>
     <p:sldId id="261" r:id="rId18"/>
     <p:sldId id="491" r:id="rId19"/>
     <p:sldId id="492" r:id="rId20"/>
     <p:sldId id="493" r:id="rId21"/>
-    <p:sldId id="264" r:id="rId23"/>
-    <p:sldId id="497" r:id="rId25"/>
+    <p:sldId id="264" r:id="rId22"/>
+    <p:sldId id="497" r:id="rId23"/>
   </p:sldIdLst>
   <p:sldSz cx="12192000" cy="6858000"/>
   <p:notesSz cx="6858000" cy="9144000"/>
   <p:embeddedFontLst>
     <p:embeddedFont>
-      <p:font typeface="Malgun Gothic" panose="020B0503020000020004" pitchFamily="50" charset="-127"/>
-      <p:regular r:id="rId27"/>
-      <p:bold r:id="rId28"/>
-    </p:embeddedFont>
-    <p:embeddedFont>
       <p:font typeface="KoPub돋움체 Bold" panose="00000800000000000000" pitchFamily="2" charset="-127"/>
-      <p:bold r:id="rId29"/>
+      <p:bold r:id="rId25"/>
     </p:embeddedFont>
     <p:embeddedFont>
       <p:font typeface="KoPub돋움체 Medium" panose="00000600000000000000" pitchFamily="2" charset="-127"/>
-      <p:regular r:id="rId30"/>
+      <p:regular r:id="rId26"/>
     </p:embeddedFont>
   </p:embeddedFontLst>
   <p:defaultTextStyle>
@@ -162,15 +157,13 @@
             <p14:sldId id="270"/>
             <p14:sldId id="268"/>
             <p14:sldId id="487"/>
-            <p14:sldId id="262"/>
             <p14:sldId id="277"/>
+            <p14:sldId id="498"/>
             <p14:sldId id="261"/>
             <p14:sldId id="491"/>
             <p14:sldId id="492"/>
             <p14:sldId id="493"/>
-            <p14:sldId id="498"/>
             <p14:sldId id="264"/>
-            <p14:sldId id="278"/>
             <p14:sldId id="497"/>
           </p14:sldIdLst>
         </p14:section>
@@ -1125,7 +1118,7 @@
 </file>
 
 <file path=ppt/notesSlides/notesSlide10.xml><?xml version="1.0" encoding="utf-8"?>
-<p:notes xmlns:a="http://schemas.openxmlformats.org/drawingml/2006/main" xmlns:p="http://schemas.openxmlformats.org/presentationml/2006/main" xmlns:r="http://schemas.openxmlformats.org/officeDocument/2006/relationships">
+<p:notes xmlns:a="http://schemas.openxmlformats.org/drawingml/2006/main" xmlns:r="http://schemas.openxmlformats.org/officeDocument/2006/relationships" xmlns:p="http://schemas.openxmlformats.org/presentationml/2006/main">
   <p:cSld>
     <p:spTree>
       <p:nvGrpSpPr>
@@ -1145,7 +1138,7 @@
         <p:nvSpPr>
           <p:cNvPr id="2" name="Slide Image Placeholder 1"/>
           <p:cNvSpPr>
-            <a:spLocks noGrp="1"/>
+            <a:spLocks noGrp="1" noRot="1" noChangeAspect="1"/>
           </p:cNvSpPr>
           <p:nvPr>
             <p:ph type="sldImg" idx="2"/>
@@ -1160,357 +1153,7 @@
             <a:spLocks noGrp="1"/>
           </p:cNvSpPr>
           <p:nvPr>
-            <p:ph type="body" idx="3" sz="quarter"/>
-          </p:nvPr>
-        </p:nvSpPr>
-        <p:spPr/>
-        <p:txBody>
-          <a:bodyPr/>
-          <a:lstStyle/>
-          <a:p>
-            <a:r>
-              <a:t>Table 2-1은 고혈압 결과입니다. 5-fold 평균 AUC가 Baseline 0.796에서 AEC와 체성분을 더한 모델 0.811로 올랐고, 신촌에서는 0.718에서 0.741로 올랐습니다. Baseline 대비 DeLong p-value는 Internal 0.035, External 0.011로 두 코호트 모두 유의했습니다. 다만 sensitivity는 오르고 specificity는 내려가는 경향이 있어 cutoff의 영향도 함께 봐야 합니다.</a:t>
-            </a:r>
-          </a:p>
-        </p:txBody>
-      </p:sp>
-      <p:sp>
-        <p:nvSpPr>
-          <p:cNvPr id="4" name="Slide Number Placeholder 3"/>
-          <p:cNvSpPr>
-            <a:spLocks noGrp="1"/>
-          </p:cNvSpPr>
-          <p:nvPr>
-            <p:ph type="sldNum" idx="5" sz="quarter"/>
-          </p:nvPr>
-        </p:nvSpPr>
-        <p:spPr/>
-      </p:sp>
-    </p:spTree>
-  </p:cSld>
-  <p:clrMapOvr>
-    <a:masterClrMapping/>
-  </p:clrMapOvr>
-</p:notes>
-</file>
-
-<file path=ppt/notesSlides/notesSlide11.xml><?xml version="1.0" encoding="utf-8"?>
-<p:notes xmlns:a="http://schemas.openxmlformats.org/drawingml/2006/main" xmlns:p="http://schemas.openxmlformats.org/presentationml/2006/main" xmlns:r="http://schemas.openxmlformats.org/officeDocument/2006/relationships">
-  <p:cSld>
-    <p:spTree>
-      <p:nvGrpSpPr>
-        <p:cNvPr id="1" name=""/>
-        <p:cNvGrpSpPr/>
-        <p:nvPr/>
-      </p:nvGrpSpPr>
-      <p:grpSpPr>
-        <a:xfrm>
-          <a:off x="0" y="0"/>
-          <a:ext cx="0" cy="0"/>
-          <a:chOff x="0" y="0"/>
-          <a:chExt cx="0" cy="0"/>
-        </a:xfrm>
-      </p:grpSpPr>
-      <p:sp>
-        <p:nvSpPr>
-          <p:cNvPr id="2" name="Slide Image Placeholder 1"/>
-          <p:cNvSpPr>
-            <a:spLocks noGrp="1"/>
-          </p:cNvSpPr>
-          <p:nvPr>
-            <p:ph type="sldImg" idx="2"/>
-          </p:nvPr>
-        </p:nvSpPr>
-        <p:spPr/>
-      </p:sp>
-      <p:sp>
-        <p:nvSpPr>
-          <p:cNvPr id="3" name="Notes Placeholder 2"/>
-          <p:cNvSpPr>
-            <a:spLocks noGrp="1"/>
-          </p:cNvSpPr>
-          <p:nvPr>
-            <p:ph type="body" idx="3" sz="quarter"/>
-          </p:nvPr>
-        </p:nvSpPr>
-        <p:spPr/>
-        <p:txBody>
-          <a:bodyPr/>
-          <a:lstStyle/>
-          <a:p>
-            <a:r>
-              <a:t>Table 2-2는 당뇨병입니다. Internal은 평균 AUC가 0.712에서 0.736으로 올랐지만 p=0.078로 유의하지 않았고, External은 0.665에서 0.706으로 올라 p&lt;0.001로 유의했습니다. 내부에서는 경향성 수준이고 외부에서만 확인된 결과입니다.</a:t>
-            </a:r>
-          </a:p>
-        </p:txBody>
-      </p:sp>
-      <p:sp>
-        <p:nvSpPr>
-          <p:cNvPr id="4" name="Slide Number Placeholder 3"/>
-          <p:cNvSpPr>
-            <a:spLocks noGrp="1"/>
-          </p:cNvSpPr>
-          <p:nvPr>
-            <p:ph type="sldNum" idx="5" sz="quarter"/>
-          </p:nvPr>
-        </p:nvSpPr>
-        <p:spPr/>
-      </p:sp>
-    </p:spTree>
-  </p:cSld>
-  <p:clrMapOvr>
-    <a:masterClrMapping/>
-  </p:clrMapOvr>
-</p:notes>
-</file>
-
-<file path=ppt/notesSlides/notesSlide12.xml><?xml version="1.0" encoding="utf-8"?>
-<p:notes xmlns:a="http://schemas.openxmlformats.org/drawingml/2006/main" xmlns:p="http://schemas.openxmlformats.org/presentationml/2006/main" xmlns:r="http://schemas.openxmlformats.org/officeDocument/2006/relationships">
-  <p:cSld>
-    <p:spTree>
-      <p:nvGrpSpPr>
-        <p:cNvPr id="1" name=""/>
-        <p:cNvGrpSpPr/>
-        <p:nvPr/>
-      </p:nvGrpSpPr>
-      <p:grpSpPr>
-        <a:xfrm>
-          <a:off x="0" y="0"/>
-          <a:ext cx="0" cy="0"/>
-          <a:chOff x="0" y="0"/>
-          <a:chExt cx="0" cy="0"/>
-        </a:xfrm>
-      </p:grpSpPr>
-      <p:sp>
-        <p:nvSpPr>
-          <p:cNvPr id="2" name="Slide Image Placeholder 1"/>
-          <p:cNvSpPr>
-            <a:spLocks noGrp="1"/>
-          </p:cNvSpPr>
-          <p:nvPr>
-            <p:ph type="sldImg" idx="2"/>
-          </p:nvPr>
-        </p:nvSpPr>
-        <p:spPr/>
-      </p:sp>
-      <p:sp>
-        <p:nvSpPr>
-          <p:cNvPr id="3" name="Notes Placeholder 2"/>
-          <p:cNvSpPr>
-            <a:spLocks noGrp="1"/>
-          </p:cNvSpPr>
-          <p:nvPr>
-            <p:ph type="body" idx="3" sz="quarter"/>
-          </p:nvPr>
-        </p:nvSpPr>
-        <p:spPr/>
-        <p:txBody>
-          <a:bodyPr/>
-          <a:lstStyle/>
-          <a:p>
-            <a:r>
-              <a:t>Table 2-3은 만성신장질환입니다. Internal은 0.770에서 0.784로 올랐지만 p=0.39로 유의하지 않았습니다. 양성이 105명뿐이라 fold별 변동도 큽니다. External은 0.615에서 0.681로 올라 p&lt;0.001로 유의했습니다. 다만 외부에서 Baseline 자체가 0.615로 낮았다는 점을 함께 봐야 합니다.</a:t>
-            </a:r>
-          </a:p>
-        </p:txBody>
-      </p:sp>
-      <p:sp>
-        <p:nvSpPr>
-          <p:cNvPr id="4" name="Slide Number Placeholder 3"/>
-          <p:cNvSpPr>
-            <a:spLocks noGrp="1"/>
-          </p:cNvSpPr>
-          <p:nvPr>
-            <p:ph type="sldNum" idx="5" sz="quarter"/>
-          </p:nvPr>
-        </p:nvSpPr>
-        <p:spPr/>
-      </p:sp>
-    </p:spTree>
-  </p:cSld>
-  <p:clrMapOvr>
-    <a:masterClrMapping/>
-  </p:clrMapOvr>
-</p:notes>
-</file>
-
-<file path=ppt/notesSlides/notesSlide13.xml><?xml version="1.0" encoding="utf-8"?>
-<p:notes xmlns:a="http://schemas.openxmlformats.org/drawingml/2006/main" xmlns:p="http://schemas.openxmlformats.org/presentationml/2006/main" xmlns:r="http://schemas.openxmlformats.org/officeDocument/2006/relationships">
-  <p:cSld>
-    <p:spTree>
-      <p:nvGrpSpPr>
-        <p:cNvPr id="1" name=""/>
-        <p:cNvGrpSpPr/>
-        <p:nvPr/>
-      </p:nvGrpSpPr>
-      <p:grpSpPr>
-        <a:xfrm>
-          <a:off x="0" y="0"/>
-          <a:ext cx="0" cy="0"/>
-          <a:chOff x="0" y="0"/>
-          <a:chExt cx="0" cy="0"/>
-        </a:xfrm>
-      </p:grpSpPr>
-      <p:sp>
-        <p:nvSpPr>
-          <p:cNvPr id="2" name="Slide Image Placeholder 1"/>
-          <p:cNvSpPr>
-            <a:spLocks noGrp="1"/>
-          </p:cNvSpPr>
-          <p:nvPr>
-            <p:ph type="sldImg" idx="2"/>
-          </p:nvPr>
-        </p:nvSpPr>
-        <p:spPr/>
-      </p:sp>
-      <p:sp>
-        <p:nvSpPr>
-          <p:cNvPr id="3" name="Notes Placeholder 2"/>
-          <p:cNvSpPr>
-            <a:spLocks noGrp="1"/>
-          </p:cNvSpPr>
-          <p:nvPr>
-            <p:ph type="body" idx="3" sz="quarter"/>
-          </p:nvPr>
-        </p:nvSpPr>
-        <p:spPr/>
-        <p:txBody>
-          <a:bodyPr/>
-          <a:lstStyle/>
-          <a:p>
-            <a:r>
-              <a:t>다음 두 슬라이드의 Coefficient가 어떻게 나왔는지 설명드립니다. 강남 전체 1,260명으로 질환마다 규제 없는 로지스틱 회귀를 따로 적합했습니다. Baseline은 성별, 나이, 키, 몸무게이고, Best는 여기에 AEC와 체성분 FPCA 점수 14개를 더한 것입니다. 연속 변수는 표준화했기 때문에 Coefficient는 변수가 1 표준편차 커질 때 log-odds가 얼마나 변하는지를 뜻합니다. p-value는 Wald 검정으로, 이 변수의 계수가 0이라고 가정했을 때 Coefficient를 표준오차로 나눈 Z값이 얼마나 극단적인지를 봅니다. 질환군과 비질환군의 평균을 직접 비교한 값이 아니라 다른 변수를 보정한 뒤의 독립적 효과라는 점이 중요합니다.</a:t>
-            </a:r>
-          </a:p>
-        </p:txBody>
-      </p:sp>
-      <p:sp>
-        <p:nvSpPr>
-          <p:cNvPr id="4" name="Slide Number Placeholder 3"/>
-          <p:cNvSpPr>
-            <a:spLocks noGrp="1"/>
-          </p:cNvSpPr>
-          <p:nvPr>
-            <p:ph type="sldNum" idx="5" sz="quarter"/>
-          </p:nvPr>
-        </p:nvSpPr>
-        <p:spPr/>
-      </p:sp>
-    </p:spTree>
-  </p:cSld>
-  <p:clrMapOvr>
-    <a:masterClrMapping/>
-  </p:clrMapOvr>
-</p:notes>
-</file>
-
-<file path=ppt/notesSlides/notesSlide14.xml><?xml version="1.0" encoding="utf-8"?>
-<p:notes xmlns:a="http://schemas.openxmlformats.org/drawingml/2006/main" xmlns:p="http://schemas.openxmlformats.org/presentationml/2006/main" xmlns:r="http://schemas.openxmlformats.org/officeDocument/2006/relationships">
-  <p:cSld>
-    <p:spTree>
-      <p:nvGrpSpPr>
-        <p:cNvPr id="1" name=""/>
-        <p:cNvGrpSpPr/>
-        <p:nvPr/>
-      </p:nvGrpSpPr>
-      <p:grpSpPr>
-        <a:xfrm>
-          <a:off x="0" y="0"/>
-          <a:ext cx="0" cy="0"/>
-          <a:chOff x="0" y="0"/>
-          <a:chExt cx="0" cy="0"/>
-        </a:xfrm>
-      </p:grpSpPr>
-      <p:sp>
-        <p:nvSpPr>
-          <p:cNvPr id="2" name="Slide Image Placeholder 1"/>
-          <p:cNvSpPr>
-            <a:spLocks noGrp="1"/>
-          </p:cNvSpPr>
-          <p:nvPr>
-            <p:ph type="sldImg" idx="2"/>
-          </p:nvPr>
-        </p:nvSpPr>
-        <p:spPr/>
-      </p:sp>
-      <p:sp>
-        <p:nvSpPr>
-          <p:cNvPr id="3" name="Notes Placeholder 2"/>
-          <p:cNvSpPr>
-            <a:spLocks noGrp="1"/>
-          </p:cNvSpPr>
-          <p:nvPr>
-            <p:ph type="body" idx="3" sz="quarter"/>
-          </p:nvPr>
-        </p:nvSpPr>
-        <p:spPr/>
-        <p:txBody>
-          <a:bodyPr/>
-          <a:lstStyle/>
-          <a:p>
-            <a:r>
-              <a:t>Table 3은 Baseline과 Best의 계수 비교입니다. Baseline에서는 성별, 나이, 키, 몸무게가 모두 유의했습니다. AEC와 체성분을 추가하면 성별과 나이는 대체로 유의하게 남지만 키와 몸무게는 대부분 유의하지 않게 바뀝니다. 고혈압에서 키는 p=0.346, 몸무게는 p=0.529입니다. 곡선 정보가 체격 정보를 일부 대신하고 있을 가능성이 있지만 확정은 아닙니다. 당뇨병의 몸무게만은 Best에서도 p=0.013으로 유의하게 남았습니다.</a:t>
-            </a:r>
-          </a:p>
-        </p:txBody>
-      </p:sp>
-      <p:sp>
-        <p:nvSpPr>
-          <p:cNvPr id="4" name="Slide Number Placeholder 3"/>
-          <p:cNvSpPr>
-            <a:spLocks noGrp="1"/>
-          </p:cNvSpPr>
-          <p:nvPr>
-            <p:ph type="sldNum" idx="5" sz="quarter"/>
-          </p:nvPr>
-        </p:nvSpPr>
-        <p:spPr/>
-      </p:sp>
-    </p:spTree>
-  </p:cSld>
-  <p:clrMapOvr>
-    <a:masterClrMapping/>
-  </p:clrMapOvr>
-</p:notes>
-</file>
-
-<file path=ppt/notesSlides/notesSlide15.xml><?xml version="1.0" encoding="utf-8"?>
-<p:notes xmlns:a="http://schemas.openxmlformats.org/drawingml/2006/main" xmlns:p="http://schemas.openxmlformats.org/presentationml/2006/main" xmlns:r="http://schemas.openxmlformats.org/officeDocument/2006/relationships">
-  <p:cSld>
-    <p:spTree>
-      <p:nvGrpSpPr>
-        <p:cNvPr id="1" name=""/>
-        <p:cNvGrpSpPr/>
-        <p:nvPr/>
-      </p:nvGrpSpPr>
-      <p:grpSpPr>
-        <a:xfrm>
-          <a:off x="0" y="0"/>
-          <a:ext cx="0" cy="0"/>
-          <a:chOff x="0" y="0"/>
-          <a:chExt cx="0" cy="0"/>
-        </a:xfrm>
-      </p:grpSpPr>
-      <p:sp>
-        <p:nvSpPr>
-          <p:cNvPr id="2" name="Slide Image Placeholder 1"/>
-          <p:cNvSpPr>
-            <a:spLocks noGrp="1"/>
-          </p:cNvSpPr>
-          <p:nvPr>
-            <p:ph type="sldImg" idx="2"/>
-          </p:nvPr>
-        </p:nvSpPr>
-        <p:spPr/>
-      </p:sp>
-      <p:sp>
-        <p:nvSpPr>
-          <p:cNvPr id="3" name="Notes Placeholder 2"/>
-          <p:cNvSpPr>
-            <a:spLocks noGrp="1"/>
-          </p:cNvSpPr>
-          <p:nvPr>
-            <p:ph type="body" idx="3" sz="quarter"/>
+            <p:ph type="body" sz="quarter" idx="3"/>
           </p:nvPr>
         </p:nvSpPr>
         <p:spPr/>
@@ -1531,7 +1174,7 @@
             <a:spLocks noGrp="1"/>
           </p:cNvSpPr>
           <p:nvPr>
-            <p:ph type="sldNum" idx="5" sz="quarter"/>
+            <p:ph type="sldNum" sz="quarter" idx="5"/>
           </p:nvPr>
         </p:nvSpPr>
         <p:spPr/>
@@ -1544,8 +1187,8 @@
 </p:notes>
 </file>
 
-<file path=ppt/notesSlides/notesSlide16.xml><?xml version="1.0" encoding="utf-8"?>
-<p:notes xmlns:a="http://schemas.openxmlformats.org/drawingml/2006/main" xmlns:p="http://schemas.openxmlformats.org/presentationml/2006/main" xmlns:r="http://schemas.openxmlformats.org/officeDocument/2006/relationships">
+<file path=ppt/notesSlides/notesSlide11.xml><?xml version="1.0" encoding="utf-8"?>
+<p:notes xmlns:a="http://schemas.openxmlformats.org/drawingml/2006/main" xmlns:r="http://schemas.openxmlformats.org/officeDocument/2006/relationships" xmlns:p="http://schemas.openxmlformats.org/presentationml/2006/main">
   <p:cSld>
     <p:spTree>
       <p:nvGrpSpPr>
@@ -1565,7 +1208,7 @@
         <p:nvSpPr>
           <p:cNvPr id="2" name="Slide Image Placeholder 1"/>
           <p:cNvSpPr>
-            <a:spLocks noGrp="1"/>
+            <a:spLocks noGrp="1" noRot="1" noChangeAspect="1"/>
           </p:cNvSpPr>
           <p:nvPr>
             <p:ph type="sldImg" idx="2"/>
@@ -1580,7 +1223,386 @@
             <a:spLocks noGrp="1"/>
           </p:cNvSpPr>
           <p:nvPr>
-            <p:ph type="body" idx="3" sz="quarter"/>
+            <p:ph type="body" sz="quarter" idx="3"/>
+          </p:nvPr>
+        </p:nvSpPr>
+        <p:spPr/>
+        <p:txBody>
+          <a:bodyPr/>
+          <a:lstStyle/>
+          <a:p>
+            <a:r>
+              <a:t>Figure 1은 AEC 점수 계수를 원래 곡선 위치, 즉 slice로 환산한 그림입니다. 왼쪽은 입력인 AEC 평균 곡선이고 오른쪽은 각 위치의 AEC가 1 표준편차 클 때 질환 logit이 얼마나 변하는지입니다. 0보다 위는 그 위치의 AEC가 높을수록 질환 확률이 올라가고 아래는 내려간다는 뜻입니다. 세 질환 모두 간 쪽은 양, 치골 쪽은 음이고 부호가 바뀌는 위치는 질환마다 다릅니다. 하지만 slice 번호가 환자마다 같은 해부학적 위치인지는 확인하지 못해 위치 해석은 가설 수준입니다.</a:t>
+            </a:r>
+          </a:p>
+        </p:txBody>
+      </p:sp>
+      <p:sp>
+        <p:nvSpPr>
+          <p:cNvPr id="4" name="Slide Number Placeholder 3"/>
+          <p:cNvSpPr>
+            <a:spLocks noGrp="1"/>
+          </p:cNvSpPr>
+          <p:nvPr>
+            <p:ph type="sldNum" sz="quarter" idx="5"/>
+          </p:nvPr>
+        </p:nvSpPr>
+        <p:spPr/>
+      </p:sp>
+    </p:spTree>
+  </p:cSld>
+  <p:clrMapOvr>
+    <a:masterClrMapping/>
+  </p:clrMapOvr>
+</p:notes>
+</file>
+
+<file path=ppt/notesSlides/notesSlide12.xml><?xml version="1.0" encoding="utf-8"?>
+<p:notes xmlns:a="http://schemas.openxmlformats.org/drawingml/2006/main" xmlns:r="http://schemas.openxmlformats.org/officeDocument/2006/relationships" xmlns:p="http://schemas.openxmlformats.org/presentationml/2006/main">
+  <p:cSld>
+    <p:spTree>
+      <p:nvGrpSpPr>
+        <p:cNvPr id="1" name=""/>
+        <p:cNvGrpSpPr/>
+        <p:nvPr/>
+      </p:nvGrpSpPr>
+      <p:grpSpPr>
+        <a:xfrm>
+          <a:off x="0" y="0"/>
+          <a:ext cx="0" cy="0"/>
+          <a:chOff x="0" y="0"/>
+          <a:chExt cx="0" cy="0"/>
+        </a:xfrm>
+      </p:grpSpPr>
+      <p:sp>
+        <p:nvSpPr>
+          <p:cNvPr id="2" name="Slide Image Placeholder 1"/>
+          <p:cNvSpPr>
+            <a:spLocks noGrp="1" noRot="1" noChangeAspect="1"/>
+          </p:cNvSpPr>
+          <p:nvPr>
+            <p:ph type="sldImg" idx="2"/>
+          </p:nvPr>
+        </p:nvSpPr>
+        <p:spPr/>
+      </p:sp>
+      <p:sp>
+        <p:nvSpPr>
+          <p:cNvPr id="3" name="Notes Placeholder 2"/>
+          <p:cNvSpPr>
+            <a:spLocks noGrp="1"/>
+          </p:cNvSpPr>
+          <p:nvPr>
+            <p:ph type="body" sz="quarter" idx="3"/>
+          </p:nvPr>
+        </p:nvSpPr>
+        <p:spPr/>
+        <p:txBody>
+          <a:bodyPr/>
+          <a:lstStyle/>
+          <a:p>
+            <a:r>
+              <a:t>Discussion입니다. AEC만 추가했을 때 개선은 작았고, 체성분까지 더하면 개선이 커지지만 유의한 결과는 주로 신촌에서 나왔습니다. 같은 정보라도 부위, 질환, 병원에 따라 효과가 달랐습니다. 예를 들어 강남 만성신장질환은 체성분만 추가하면 AUC가 0.015 오르는데 AEC만 추가하면 오히려 0.016 떨어집니다. 저는 같은 간에서 치골 범위로 잘라도 환자마다 장기 위치가 달라 같은 slice 번호가 서로 다른 부위를 가리킬 수 있다고 추정합니다. 이것은 아직 확인하지 못한 가설이어서 추가 검증이 필요합니다.</a:t>
+            </a:r>
+          </a:p>
+        </p:txBody>
+      </p:sp>
+      <p:sp>
+        <p:nvSpPr>
+          <p:cNvPr id="4" name="Slide Number Placeholder 3"/>
+          <p:cNvSpPr>
+            <a:spLocks noGrp="1"/>
+          </p:cNvSpPr>
+          <p:nvPr>
+            <p:ph type="sldNum" sz="quarter" idx="5"/>
+          </p:nvPr>
+        </p:nvSpPr>
+        <p:spPr/>
+      </p:sp>
+    </p:spTree>
+  </p:cSld>
+  <p:clrMapOvr>
+    <a:masterClrMapping/>
+  </p:clrMapOvr>
+</p:notes>
+</file>
+
+<file path=ppt/notesSlides/notesSlide13.xml><?xml version="1.0" encoding="utf-8"?>
+<p:notes xmlns:a="http://schemas.openxmlformats.org/drawingml/2006/main" xmlns:r="http://schemas.openxmlformats.org/officeDocument/2006/relationships" xmlns:p="http://schemas.openxmlformats.org/presentationml/2006/main">
+  <p:cSld>
+    <p:spTree>
+      <p:nvGrpSpPr>
+        <p:cNvPr id="1" name=""/>
+        <p:cNvGrpSpPr/>
+        <p:nvPr/>
+      </p:nvGrpSpPr>
+      <p:grpSpPr>
+        <a:xfrm>
+          <a:off x="0" y="0"/>
+          <a:ext cx="0" cy="0"/>
+          <a:chOff x="0" y="0"/>
+          <a:chExt cx="0" cy="0"/>
+        </a:xfrm>
+      </p:grpSpPr>
+      <p:sp>
+        <p:nvSpPr>
+          <p:cNvPr id="2" name="Slide Image Placeholder 1"/>
+          <p:cNvSpPr>
+            <a:spLocks noGrp="1" noRot="1" noChangeAspect="1"/>
+          </p:cNvSpPr>
+          <p:nvPr>
+            <p:ph type="sldImg" idx="2"/>
+          </p:nvPr>
+        </p:nvSpPr>
+        <p:spPr/>
+      </p:sp>
+      <p:sp>
+        <p:nvSpPr>
+          <p:cNvPr id="3" name="Notes Placeholder 2"/>
+          <p:cNvSpPr>
+            <a:spLocks noGrp="1"/>
+          </p:cNvSpPr>
+          <p:nvPr>
+            <p:ph type="body" sz="quarter" idx="3"/>
+          </p:nvPr>
+        </p:nvSpPr>
+        <p:spPr/>
+        <p:txBody>
+          <a:bodyPr/>
+          <a:lstStyle/>
+          <a:p>
+            <a:r>
+              <a:t>결론입니다. 기본 정보만으로 AUC는 강남 0.71에서 0.80, 신촌 0.62에서 0.72 수준이었습니다. AEC만 추가하면 변화가 미미했고 강남 만성신장질환은 오히려 낮아졌습니다. 체성분까지 추가하면 AUC가 0.014에서 0.066 올랐지만 신촌은 세 질환 모두 유의한 반면 강남은 고혈압만 유의해 병원 간 결과가 일치하지 않았습니다. 원인으로 slice 위치 불일치를 추정했지만 아직 확인하지 못했고, 이 검증이 다음 과제입니다. 감사합니다.</a:t>
+            </a:r>
+          </a:p>
+        </p:txBody>
+      </p:sp>
+      <p:sp>
+        <p:nvSpPr>
+          <p:cNvPr id="4" name="Slide Number Placeholder 3"/>
+          <p:cNvSpPr>
+            <a:spLocks noGrp="1"/>
+          </p:cNvSpPr>
+          <p:nvPr>
+            <p:ph type="sldNum" sz="quarter" idx="5"/>
+          </p:nvPr>
+        </p:nvSpPr>
+        <p:spPr/>
+      </p:sp>
+    </p:spTree>
+  </p:cSld>
+  <p:clrMapOvr>
+    <a:masterClrMapping/>
+  </p:clrMapOvr>
+</p:notes>
+</file>
+
+<file path=ppt/notesSlides/notesSlide14.xml><?xml version="1.0" encoding="utf-8"?>
+<p:notes xmlns:a="http://schemas.openxmlformats.org/drawingml/2006/main" xmlns:r="http://schemas.openxmlformats.org/officeDocument/2006/relationships" xmlns:p="http://schemas.openxmlformats.org/presentationml/2006/main">
+  <p:cSld>
+    <p:spTree>
+      <p:nvGrpSpPr>
+        <p:cNvPr id="1" name=""/>
+        <p:cNvGrpSpPr/>
+        <p:nvPr/>
+      </p:nvGrpSpPr>
+      <p:grpSpPr>
+        <a:xfrm>
+          <a:off x="0" y="0"/>
+          <a:ext cx="0" cy="0"/>
+          <a:chOff x="0" y="0"/>
+          <a:chExt cx="0" cy="0"/>
+        </a:xfrm>
+      </p:grpSpPr>
+      <p:sp>
+        <p:nvSpPr>
+          <p:cNvPr id="2" name="Slide Image Placeholder 1"/>
+          <p:cNvSpPr>
+            <a:spLocks noGrp="1" noRot="1" noChangeAspect="1"/>
+          </p:cNvSpPr>
+          <p:nvPr>
+            <p:ph type="sldImg" idx="2"/>
+          </p:nvPr>
+        </p:nvSpPr>
+        <p:spPr/>
+      </p:sp>
+      <p:sp>
+        <p:nvSpPr>
+          <p:cNvPr id="3" name="Notes Placeholder 2"/>
+          <p:cNvSpPr>
+            <a:spLocks noGrp="1"/>
+          </p:cNvSpPr>
+          <p:nvPr>
+            <p:ph type="body" sz="quarter" idx="3"/>
+          </p:nvPr>
+        </p:nvSpPr>
+        <p:spPr/>
+        <p:txBody>
+          <a:bodyPr/>
+          <a:lstStyle/>
+          <a:p>
+            <a:r>
+              <a:t>여기부터는 Appendix, 즉 질문이 있을 때 쓰는 예비 슬라이드입니다. 보충 그림과 표를 모아 두었습니다.</a:t>
+            </a:r>
+          </a:p>
+        </p:txBody>
+      </p:sp>
+      <p:sp>
+        <p:nvSpPr>
+          <p:cNvPr id="4" name="Slide Number Placeholder 3"/>
+          <p:cNvSpPr>
+            <a:spLocks noGrp="1"/>
+          </p:cNvSpPr>
+          <p:nvPr>
+            <p:ph type="sldNum" sz="quarter" idx="5"/>
+          </p:nvPr>
+        </p:nvSpPr>
+        <p:spPr/>
+      </p:sp>
+    </p:spTree>
+  </p:cSld>
+  <p:clrMapOvr>
+    <a:masterClrMapping/>
+  </p:clrMapOvr>
+</p:notes>
+</file>
+
+<file path=ppt/notesSlides/notesSlide15.xml><?xml version="1.0" encoding="utf-8"?>
+<p:notes xmlns:a="http://schemas.openxmlformats.org/drawingml/2006/main" xmlns:r="http://schemas.openxmlformats.org/officeDocument/2006/relationships" xmlns:p="http://schemas.openxmlformats.org/presentationml/2006/main">
+  <p:cSld>
+    <p:spTree>
+      <p:nvGrpSpPr>
+        <p:cNvPr id="1" name="">
+          <a:extLst>
+            <a:ext uri="{FF2B5EF4-FFF2-40B4-BE49-F238E27FC236}">
+              <a16:creationId xmlns:a16="http://schemas.microsoft.com/office/drawing/2014/main" id="{93949F85-BE6B-5075-93DD-06C87EF09844}"/>
+            </a:ext>
+          </a:extLst>
+        </p:cNvPr>
+        <p:cNvGrpSpPr/>
+        <p:nvPr/>
+      </p:nvGrpSpPr>
+      <p:grpSpPr>
+        <a:xfrm>
+          <a:off x="0" y="0"/>
+          <a:ext cx="0" cy="0"/>
+          <a:chOff x="0" y="0"/>
+          <a:chExt cx="0" cy="0"/>
+        </a:xfrm>
+      </p:grpSpPr>
+      <p:sp>
+        <p:nvSpPr>
+          <p:cNvPr id="2" name="Slide Image Placeholder 1">
+            <a:extLst>
+              <a:ext uri="{FF2B5EF4-FFF2-40B4-BE49-F238E27FC236}">
+                <a16:creationId xmlns:a16="http://schemas.microsoft.com/office/drawing/2014/main" id="{78CCB01C-6DFB-662E-6D77-086F50A17151}"/>
+              </a:ext>
+            </a:extLst>
+          </p:cNvPr>
+          <p:cNvSpPr>
+            <a:spLocks noGrp="1" noRot="1" noChangeAspect="1"/>
+          </p:cNvSpPr>
+          <p:nvPr>
+            <p:ph type="sldImg" idx="2"/>
+          </p:nvPr>
+        </p:nvSpPr>
+        <p:spPr/>
+      </p:sp>
+      <p:sp>
+        <p:nvSpPr>
+          <p:cNvPr id="3" name="Notes Placeholder 2">
+            <a:extLst>
+              <a:ext uri="{FF2B5EF4-FFF2-40B4-BE49-F238E27FC236}">
+                <a16:creationId xmlns:a16="http://schemas.microsoft.com/office/drawing/2014/main" id="{7DA8B0F6-581D-F115-E541-F080CF8FE923}"/>
+              </a:ext>
+            </a:extLst>
+          </p:cNvPr>
+          <p:cNvSpPr>
+            <a:spLocks noGrp="1"/>
+          </p:cNvSpPr>
+          <p:nvPr>
+            <p:ph type="body" sz="quarter" idx="3"/>
+          </p:nvPr>
+        </p:nvSpPr>
+        <p:spPr/>
+        <p:txBody>
+          <a:bodyPr/>
+          <a:lstStyle/>
+          <a:p>
+            <a:r>
+              <a:t>Calibration plot입니다. Baseline과 Best 모두 강남은 5-fold 예측값, 신촌은 고정 모델 예측값이고 5분위로 나눴습니다. 고혈압은 대체로 대각선 근처이고, 당뇨병은 class_weight를 balanced로 둔 영향으로 예측확률이 관측 빈도보다 높게 나옵니다. Brier는 Baseline 대비 Best에서 대체로 개선되지만 당뇨병 신촌만 0.238에서 0.247로 나빠졌습니다.</a:t>
+            </a:r>
+          </a:p>
+        </p:txBody>
+      </p:sp>
+      <p:sp>
+        <p:nvSpPr>
+          <p:cNvPr id="4" name="Slide Number Placeholder 3">
+            <a:extLst>
+              <a:ext uri="{FF2B5EF4-FFF2-40B4-BE49-F238E27FC236}">
+                <a16:creationId xmlns:a16="http://schemas.microsoft.com/office/drawing/2014/main" id="{437BEC81-8798-CC3F-98AB-C751B4C75E29}"/>
+              </a:ext>
+            </a:extLst>
+          </p:cNvPr>
+          <p:cNvSpPr>
+            <a:spLocks noGrp="1"/>
+          </p:cNvSpPr>
+          <p:nvPr>
+            <p:ph type="sldNum" sz="quarter" idx="5"/>
+          </p:nvPr>
+        </p:nvSpPr>
+        <p:spPr/>
+      </p:sp>
+    </p:spTree>
+    <p:extLst>
+      <p:ext uri="{BB962C8B-B14F-4D97-AF65-F5344CB8AC3E}">
+        <p14:creationId xmlns:p14="http://schemas.microsoft.com/office/powerpoint/2010/main" val="1799801764"/>
+      </p:ext>
+    </p:extLst>
+  </p:cSld>
+  <p:clrMapOvr>
+    <a:masterClrMapping/>
+  </p:clrMapOvr>
+</p:notes>
+</file>
+
+<file path=ppt/notesSlides/notesSlide16.xml><?xml version="1.0" encoding="utf-8"?>
+<p:notes xmlns:a="http://schemas.openxmlformats.org/drawingml/2006/main" xmlns:r="http://schemas.openxmlformats.org/officeDocument/2006/relationships" xmlns:p="http://schemas.openxmlformats.org/presentationml/2006/main">
+  <p:cSld>
+    <p:spTree>
+      <p:nvGrpSpPr>
+        <p:cNvPr id="1" name=""/>
+        <p:cNvGrpSpPr/>
+        <p:nvPr/>
+      </p:nvGrpSpPr>
+      <p:grpSpPr>
+        <a:xfrm>
+          <a:off x="0" y="0"/>
+          <a:ext cx="0" cy="0"/>
+          <a:chOff x="0" y="0"/>
+          <a:chExt cx="0" cy="0"/>
+        </a:xfrm>
+      </p:grpSpPr>
+      <p:sp>
+        <p:nvSpPr>
+          <p:cNvPr id="2" name="Slide Image Placeholder 1"/>
+          <p:cNvSpPr>
+            <a:spLocks noGrp="1" noRot="1" noChangeAspect="1"/>
+          </p:cNvSpPr>
+          <p:nvPr>
+            <p:ph type="sldImg" idx="2"/>
+          </p:nvPr>
+        </p:nvSpPr>
+        <p:spPr/>
+      </p:sp>
+      <p:sp>
+        <p:nvSpPr>
+          <p:cNvPr id="3" name="Notes Placeholder 2"/>
+          <p:cNvSpPr>
+            <a:spLocks noGrp="1"/>
+          </p:cNvSpPr>
+          <p:nvPr>
+            <p:ph type="body" sz="quarter" idx="3"/>
           </p:nvPr>
         </p:nvSpPr>
         <p:spPr/>
@@ -1601,7 +1623,7 @@
             <a:spLocks noGrp="1"/>
           </p:cNvSpPr>
           <p:nvPr>
-            <p:ph type="sldNum" idx="5" sz="quarter"/>
+            <p:ph type="sldNum" sz="quarter" idx="5"/>
           </p:nvPr>
         </p:nvSpPr>
         <p:spPr/>
@@ -1615,7 +1637,7 @@
 </file>
 
 <file path=ppt/notesSlides/notesSlide17.xml><?xml version="1.0" encoding="utf-8"?>
-<p:notes xmlns:a="http://schemas.openxmlformats.org/drawingml/2006/main" xmlns:p="http://schemas.openxmlformats.org/presentationml/2006/main" xmlns:r="http://schemas.openxmlformats.org/officeDocument/2006/relationships">
+<p:notes xmlns:a="http://schemas.openxmlformats.org/drawingml/2006/main" xmlns:r="http://schemas.openxmlformats.org/officeDocument/2006/relationships" xmlns:p="http://schemas.openxmlformats.org/presentationml/2006/main">
   <p:cSld>
     <p:spTree>
       <p:nvGrpSpPr>
@@ -1635,7 +1657,7 @@
         <p:nvSpPr>
           <p:cNvPr id="2" name="Slide Image Placeholder 1"/>
           <p:cNvSpPr>
-            <a:spLocks noGrp="1"/>
+            <a:spLocks noGrp="1" noRot="1" noChangeAspect="1"/>
           </p:cNvSpPr>
           <p:nvPr>
             <p:ph type="sldImg" idx="2"/>
@@ -1650,7 +1672,7 @@
             <a:spLocks noGrp="1"/>
           </p:cNvSpPr>
           <p:nvPr>
-            <p:ph type="body" idx="3" sz="quarter"/>
+            <p:ph type="body" sz="quarter" idx="3"/>
           </p:nvPr>
         </p:nvSpPr>
         <p:spPr/>
@@ -1671,7 +1693,7 @@
             <a:spLocks noGrp="1"/>
           </p:cNvSpPr>
           <p:nvPr>
-            <p:ph type="sldNum" idx="5" sz="quarter"/>
+            <p:ph type="sldNum" sz="quarter" idx="5"/>
           </p:nvPr>
         </p:nvSpPr>
         <p:spPr/>
@@ -1685,7 +1707,7 @@
 </file>
 
 <file path=ppt/notesSlides/notesSlide18.xml><?xml version="1.0" encoding="utf-8"?>
-<p:notes xmlns:a="http://schemas.openxmlformats.org/drawingml/2006/main" xmlns:p="http://schemas.openxmlformats.org/presentationml/2006/main" xmlns:r="http://schemas.openxmlformats.org/officeDocument/2006/relationships">
+<p:notes xmlns:a="http://schemas.openxmlformats.org/drawingml/2006/main" xmlns:r="http://schemas.openxmlformats.org/officeDocument/2006/relationships" xmlns:p="http://schemas.openxmlformats.org/presentationml/2006/main">
   <p:cSld>
     <p:spTree>
       <p:nvGrpSpPr>
@@ -1705,7 +1727,7 @@
         <p:nvSpPr>
           <p:cNvPr id="2" name="Slide Image Placeholder 1"/>
           <p:cNvSpPr>
-            <a:spLocks noGrp="1"/>
+            <a:spLocks noGrp="1" noRot="1" noChangeAspect="1"/>
           </p:cNvSpPr>
           <p:nvPr>
             <p:ph type="sldImg" idx="2"/>
@@ -1720,7 +1742,7 @@
             <a:spLocks noGrp="1"/>
           </p:cNvSpPr>
           <p:nvPr>
-            <p:ph type="body" idx="3" sz="quarter"/>
+            <p:ph type="body" sz="quarter" idx="3"/>
           </p:nvPr>
         </p:nvSpPr>
         <p:spPr/>
@@ -1741,7 +1763,7 @@
             <a:spLocks noGrp="1"/>
           </p:cNvSpPr>
           <p:nvPr>
-            <p:ph type="sldNum" idx="5" sz="quarter"/>
+            <p:ph type="sldNum" sz="quarter" idx="5"/>
           </p:nvPr>
         </p:nvSpPr>
         <p:spPr/>
@@ -1755,7 +1777,7 @@
 </file>
 
 <file path=ppt/notesSlides/notesSlide19.xml><?xml version="1.0" encoding="utf-8"?>
-<p:notes xmlns:a="http://schemas.openxmlformats.org/drawingml/2006/main" xmlns:p="http://schemas.openxmlformats.org/presentationml/2006/main" xmlns:r="http://schemas.openxmlformats.org/officeDocument/2006/relationships">
+<p:notes xmlns:a="http://schemas.openxmlformats.org/drawingml/2006/main" xmlns:r="http://schemas.openxmlformats.org/officeDocument/2006/relationships" xmlns:p="http://schemas.openxmlformats.org/presentationml/2006/main">
   <p:cSld>
     <p:spTree>
       <p:nvGrpSpPr>
@@ -1775,7 +1797,7 @@
         <p:nvSpPr>
           <p:cNvPr id="2" name="Slide Image Placeholder 1"/>
           <p:cNvSpPr>
-            <a:spLocks noGrp="1"/>
+            <a:spLocks noGrp="1" noRot="1" noChangeAspect="1"/>
           </p:cNvSpPr>
           <p:nvPr>
             <p:ph type="sldImg" idx="2"/>
@@ -1790,7 +1812,7 @@
             <a:spLocks noGrp="1"/>
           </p:cNvSpPr>
           <p:nvPr>
-            <p:ph type="body" idx="3" sz="quarter"/>
+            <p:ph type="body" sz="quarter" idx="3"/>
           </p:nvPr>
         </p:nvSpPr>
         <p:spPr/>
@@ -1811,7 +1833,7 @@
             <a:spLocks noGrp="1"/>
           </p:cNvSpPr>
           <p:nvPr>
-            <p:ph type="sldNum" idx="5" sz="quarter"/>
+            <p:ph type="sldNum" sz="quarter" idx="5"/>
           </p:nvPr>
         </p:nvSpPr>
         <p:spPr/>
@@ -1895,7 +1917,7 @@
 </file>
 
 <file path=ppt/notesSlides/notesSlide20.xml><?xml version="1.0" encoding="utf-8"?>
-<p:notes xmlns:a="http://schemas.openxmlformats.org/drawingml/2006/main" xmlns:p="http://schemas.openxmlformats.org/presentationml/2006/main" xmlns:r="http://schemas.openxmlformats.org/officeDocument/2006/relationships">
+<p:notes xmlns:a="http://schemas.openxmlformats.org/drawingml/2006/main" xmlns:r="http://schemas.openxmlformats.org/officeDocument/2006/relationships" xmlns:p="http://schemas.openxmlformats.org/presentationml/2006/main">
   <p:cSld>
     <p:spTree>
       <p:nvGrpSpPr>
@@ -1915,7 +1937,7 @@
         <p:nvSpPr>
           <p:cNvPr id="2" name="Slide Image Placeholder 1"/>
           <p:cNvSpPr>
-            <a:spLocks noGrp="1"/>
+            <a:spLocks noGrp="1" noRot="1" noChangeAspect="1"/>
           </p:cNvSpPr>
           <p:nvPr>
             <p:ph type="sldImg" idx="2"/>
@@ -1930,7 +1952,7 @@
             <a:spLocks noGrp="1"/>
           </p:cNvSpPr>
           <p:nvPr>
-            <p:ph type="body" idx="3" sz="quarter"/>
+            <p:ph type="body" sz="quarter" idx="3"/>
           </p:nvPr>
         </p:nvSpPr>
         <p:spPr/>
@@ -1951,7 +1973,7 @@
             <a:spLocks noGrp="1"/>
           </p:cNvSpPr>
           <p:nvPr>
-            <p:ph type="sldNum" idx="5" sz="quarter"/>
+            <p:ph type="sldNum" sz="quarter" idx="5"/>
           </p:nvPr>
         </p:nvSpPr>
         <p:spPr/>
@@ -1965,7 +1987,7 @@
 </file>
 
 <file path=ppt/notesSlides/notesSlide21.xml><?xml version="1.0" encoding="utf-8"?>
-<p:notes xmlns:a="http://schemas.openxmlformats.org/drawingml/2006/main" xmlns:p="http://schemas.openxmlformats.org/presentationml/2006/main" xmlns:r="http://schemas.openxmlformats.org/officeDocument/2006/relationships">
+<p:notes xmlns:a="http://schemas.openxmlformats.org/drawingml/2006/main" xmlns:r="http://schemas.openxmlformats.org/officeDocument/2006/relationships" xmlns:p="http://schemas.openxmlformats.org/presentationml/2006/main">
   <p:cSld>
     <p:spTree>
       <p:nvGrpSpPr>
@@ -1985,7 +2007,7 @@
         <p:nvSpPr>
           <p:cNvPr id="2" name="Slide Image Placeholder 1"/>
           <p:cNvSpPr>
-            <a:spLocks noGrp="1"/>
+            <a:spLocks noGrp="1" noRot="1" noChangeAspect="1"/>
           </p:cNvSpPr>
           <p:nvPr>
             <p:ph type="sldImg" idx="2"/>
@@ -2000,7 +2022,7 @@
             <a:spLocks noGrp="1"/>
           </p:cNvSpPr>
           <p:nvPr>
-            <p:ph type="body" idx="3" sz="quarter"/>
+            <p:ph type="body" sz="quarter" idx="3"/>
           </p:nvPr>
         </p:nvSpPr>
         <p:spPr/>
@@ -2021,7 +2043,7 @@
             <a:spLocks noGrp="1"/>
           </p:cNvSpPr>
           <p:nvPr>
-            <p:ph type="sldNum" idx="5" sz="quarter"/>
+            <p:ph type="sldNum" sz="quarter" idx="5"/>
           </p:nvPr>
         </p:nvSpPr>
         <p:spPr/>
@@ -2035,7 +2057,7 @@
 </file>
 
 <file path=ppt/notesSlides/notesSlide22.xml><?xml version="1.0" encoding="utf-8"?>
-<p:notes xmlns:a="http://schemas.openxmlformats.org/drawingml/2006/main" xmlns:p="http://schemas.openxmlformats.org/presentationml/2006/main" xmlns:r="http://schemas.openxmlformats.org/officeDocument/2006/relationships">
+<p:notes xmlns:a="http://schemas.openxmlformats.org/drawingml/2006/main" xmlns:r="http://schemas.openxmlformats.org/officeDocument/2006/relationships" xmlns:p="http://schemas.openxmlformats.org/presentationml/2006/main">
   <p:cSld>
     <p:spTree>
       <p:nvGrpSpPr>
@@ -2055,7 +2077,7 @@
         <p:nvSpPr>
           <p:cNvPr id="2" name="Slide Image Placeholder 1"/>
           <p:cNvSpPr>
-            <a:spLocks noGrp="1"/>
+            <a:spLocks noGrp="1" noRot="1" noChangeAspect="1"/>
           </p:cNvSpPr>
           <p:nvPr>
             <p:ph type="sldImg" idx="2"/>
@@ -2070,7 +2092,7 @@
             <a:spLocks noGrp="1"/>
           </p:cNvSpPr>
           <p:nvPr>
-            <p:ph type="body" idx="3" sz="quarter"/>
+            <p:ph type="body" sz="quarter" idx="3"/>
           </p:nvPr>
         </p:nvSpPr>
         <p:spPr/>
@@ -2091,7 +2113,7 @@
             <a:spLocks noGrp="1"/>
           </p:cNvSpPr>
           <p:nvPr>
-            <p:ph type="sldNum" idx="5" sz="quarter"/>
+            <p:ph type="sldNum" sz="quarter" idx="5"/>
           </p:nvPr>
         </p:nvSpPr>
         <p:spPr/>
@@ -2289,7 +2311,7 @@
           <a:lstStyle/>
           <a:p>
             <a:r>
-              <a:t>Figure 1은 AEC 점수 계수를 원래 곡선 위치, 즉 slice로 환산한 그림입니다. 왼쪽은 입력인 AEC 평균 곡선이고 오른쪽은 각 위치의 AEC가 1 표준편차 클 때 질환 logit이 얼마나 변하는지입니다. 0보다 위는 그 위치의 AEC가 높을수록 질환 확률이 올라가고 아래는 내려간다는 뜻입니다. 세 질환 모두 간 쪽은 양, 치골 쪽은 음이고 부호가 바뀌는 위치는 질환마다 다릅니다. 하지만 slice 번호가 환자마다 같은 해부학적 위치인지는 확인하지 못해 위치 해석은 가설 수준입니다.</a:t>
+              <a:t>Table 2-1은 고혈압 결과입니다. 5-fold 평균 AUC가 Baseline 0.796에서 AEC와 체성분을 더한 모델 0.811로 올랐고, 신촌에서는 0.718에서 0.741로 올랐습니다. Baseline 대비 DeLong p-value는 Internal 0.035, External 0.011로 두 코호트 모두 유의했습니다. 다만 sensitivity는 오르고 specificity는 내려가는 경향이 있어 cutoff의 영향도 함께 봐야 합니다.</a:t>
             </a:r>
           </a:p>
         </p:txBody>
@@ -2359,7 +2381,7 @@
           <a:lstStyle/>
           <a:p>
             <a:r>
-              <a:t>Discussion입니다. AEC만 추가했을 때 개선은 작았고, 체성분까지 더하면 개선이 커지지만 유의한 결과는 주로 신촌에서 나왔습니다. 같은 정보라도 부위, 질환, 병원에 따라 효과가 달랐습니다. 예를 들어 강남 만성신장질환은 체성분만 추가하면 AUC가 0.015 오르는데 AEC만 추가하면 오히려 0.016 떨어집니다. 저는 같은 간에서 치골 범위로 잘라도 환자마다 장기 위치가 달라 같은 slice 번호가 서로 다른 부위를 가리킬 수 있다고 추정합니다. 이것은 아직 확인하지 못한 가설이어서 추가 검증이 필요합니다.</a:t>
+              <a:t>Table 2-2는 당뇨병입니다. Internal은 평균 AUC가 0.712에서 0.736으로 올랐지만 p=0.078로 유의하지 않았고, External은 0.665에서 0.706으로 올라 p&lt;0.001로 유의했습니다. 내부에서는 경향성 수준이고 외부에서만 확인된 결과입니다.</a:t>
             </a:r>
           </a:p>
         </p:txBody>
@@ -2429,7 +2451,7 @@
           <a:lstStyle/>
           <a:p>
             <a:r>
-              <a:t>결론입니다. 기본 정보만으로 AUC는 강남 0.71에서 0.80, 신촌 0.62에서 0.72 수준이었습니다. AEC만 추가하면 변화가 미미했고 강남 만성신장질환은 오히려 낮아졌습니다. 체성분까지 추가하면 AUC가 0.014에서 0.066 올랐지만 신촌은 세 질환 모두 유의한 반면 강남은 고혈압만 유의해 병원 간 결과가 일치하지 않았습니다. 원인으로 slice 위치 불일치를 추정했지만 아직 확인하지 못했고, 이 검증이 다음 과제입니다. 감사합니다.</a:t>
+              <a:t>Table 2-3은 만성신장질환입니다. Internal은 0.770에서 0.784로 올랐지만 p=0.39로 유의하지 않았습니다. 양성이 105명뿐이라 fold별 변동도 큽니다. External은 0.615에서 0.681로 올라 p&lt;0.001로 유의했습니다. 다만 외부에서 Baseline 자체가 0.615로 낮았다는 점을 함께 봐야 합니다.</a:t>
             </a:r>
           </a:p>
         </p:txBody>
@@ -2499,7 +2521,7 @@
           <a:lstStyle/>
           <a:p>
             <a:r>
-              <a:t>여기부터는 Appendix, 즉 질문이 있을 때 쓰는 예비 슬라이드입니다. 보충 그림과 표를 모아 두었습니다.</a:t>
+              <a:t>다음 두 슬라이드의 Coefficient가 어떻게 나왔는지 설명드립니다. 강남 전체 1,260명으로 질환마다 규제 없는 로지스틱 회귀를 따로 적합했습니다. Baseline은 성별, 나이, 키, 몸무게이고, Best는 여기에 AEC와 체성분 FPCA 점수 14개를 더한 것입니다. 연속 변수는 표준화했기 때문에 Coefficient는 변수가 1 표준편차 커질 때 log-odds가 얼마나 변하는지를 뜻합니다. p-value는 Wald 검정으로, 이 변수의 계수가 0이라고 가정했을 때 Coefficient를 표준오차로 나눈 Z값이 얼마나 극단적인지를 봅니다. 질환군과 비질환군의 평균을 직접 비교한 값이 아니라 다른 변수를 보정한 뒤의 독립적 효과라는 점이 중요합니다.</a:t>
             </a:r>
           </a:p>
         </p:txBody>
@@ -2529,13 +2551,7 @@
   <p:cSld>
     <p:spTree>
       <p:nvGrpSpPr>
-        <p:cNvPr id="1" name="">
-          <a:extLst>
-            <a:ext uri="{FF2B5EF4-FFF2-40B4-BE49-F238E27FC236}">
-              <a16:creationId xmlns:a16="http://schemas.microsoft.com/office/drawing/2014/main" id="{93949F85-BE6B-5075-93DD-06C87EF09844}"/>
-            </a:ext>
-          </a:extLst>
-        </p:cNvPr>
+        <p:cNvPr id="1" name=""/>
         <p:cNvGrpSpPr/>
         <p:nvPr/>
       </p:nvGrpSpPr>
@@ -2549,13 +2565,7 @@
       </p:grpSpPr>
       <p:sp>
         <p:nvSpPr>
-          <p:cNvPr id="2" name="Slide Image Placeholder 1">
-            <a:extLst>
-              <a:ext uri="{FF2B5EF4-FFF2-40B4-BE49-F238E27FC236}">
-                <a16:creationId xmlns:a16="http://schemas.microsoft.com/office/drawing/2014/main" id="{78CCB01C-6DFB-662E-6D77-086F50A17151}"/>
-              </a:ext>
-            </a:extLst>
-          </p:cNvPr>
+          <p:cNvPr id="2" name="Slide Image Placeholder 1"/>
           <p:cNvSpPr>
             <a:spLocks noGrp="1" noRot="1" noChangeAspect="1"/>
           </p:cNvSpPr>
@@ -2567,13 +2577,7 @@
       </p:sp>
       <p:sp>
         <p:nvSpPr>
-          <p:cNvPr id="3" name="Notes Placeholder 2">
-            <a:extLst>
-              <a:ext uri="{FF2B5EF4-FFF2-40B4-BE49-F238E27FC236}">
-                <a16:creationId xmlns:a16="http://schemas.microsoft.com/office/drawing/2014/main" id="{7DA8B0F6-581D-F115-E541-F080CF8FE923}"/>
-              </a:ext>
-            </a:extLst>
-          </p:cNvPr>
+          <p:cNvPr id="3" name="Notes Placeholder 2"/>
           <p:cNvSpPr>
             <a:spLocks noGrp="1"/>
           </p:cNvSpPr>
@@ -2587,20 +2591,14 @@
           <a:lstStyle/>
           <a:p>
             <a:r>
-              <a:t>Calibration plot입니다. Baseline과 Best 모두 강남은 5-fold 예측값, 신촌은 고정 모델 예측값이고 5분위로 나눴습니다. 고혈압은 대체로 대각선 근처이고, 당뇨병은 class_weight를 balanced로 둔 영향으로 예측확률이 관측 빈도보다 높게 나옵니다. Brier는 Baseline 대비 Best에서 대체로 개선되지만 당뇨병 신촌만 0.238에서 0.247로 나빠졌습니다.</a:t>
+              <a:t>Table 3은 Baseline과 Best의 계수 비교입니다. Baseline에서는 성별, 나이, 키, 몸무게가 모두 유의했습니다. AEC와 체성분을 추가하면 성별과 나이는 대체로 유의하게 남지만 키와 몸무게는 대부분 유의하지 않게 바뀝니다. 고혈압에서 키는 p=0.346, 몸무게는 p=0.529입니다. 곡선 정보가 체격 정보를 일부 대신하고 있을 가능성이 있지만 확정은 아닙니다. 당뇨병의 몸무게만은 Best에서도 p=0.013으로 유의하게 남았습니다.</a:t>
             </a:r>
           </a:p>
         </p:txBody>
       </p:sp>
       <p:sp>
         <p:nvSpPr>
-          <p:cNvPr id="4" name="Slide Number Placeholder 3">
-            <a:extLst>
-              <a:ext uri="{FF2B5EF4-FFF2-40B4-BE49-F238E27FC236}">
-                <a16:creationId xmlns:a16="http://schemas.microsoft.com/office/drawing/2014/main" id="{437BEC81-8798-CC3F-98AB-C751B4C75E29}"/>
-              </a:ext>
-            </a:extLst>
-          </p:cNvPr>
+          <p:cNvPr id="4" name="Slide Number Placeholder 3"/>
           <p:cNvSpPr>
             <a:spLocks noGrp="1"/>
           </p:cNvSpPr>
@@ -2611,11 +2609,6 @@
         <p:spPr/>
       </p:sp>
     </p:spTree>
-    <p:extLst>
-      <p:ext uri="{BB962C8B-B14F-4D97-AF65-F5344CB8AC3E}">
-        <p14:creationId xmlns:p14="http://schemas.microsoft.com/office/powerpoint/2010/main" val="1799801764"/>
-      </p:ext>
-    </p:extLst>
   </p:cSld>
   <p:clrMapOvr>
     <a:masterClrMapping/>
@@ -6383,11 +6376,7 @@
             <p:ph idx="1"/>
           </p:nvPr>
         </p:nvSpPr>
-        <p:spPr>
-          <a:xfrm>
-            <a:ext cx="11176000" cy="1134400"/>
-          </a:xfrm>
-        </p:spPr>
+        <p:spPr/>
         <p:txBody>
           <a:bodyPr>
             <a:normAutofit/>
@@ -6401,9 +6390,9 @@
             </a:pPr>
             <a:r>
               <a:rPr lang="en-US" altLang="ko-KR" sz="1600" b="1" dirty="0">
-                <a:latin typeface="Malgun Gothic"/>
+                <a:latin typeface="KoPub돋움체 Medium" panose="00000600000000000000" pitchFamily="2" charset="-127"/>
               </a:rPr>
-              <a:t>AEC 점수는 세 질환 모두 비유의. 유의한 점수는 체성분(VAT·SAT·LAMA·NAMA·IMATA)에서만 나옴</a:t>
+              <a:t>체성분과 함께 넣으면 AEC 점수는 세 질환 모두 비유의(AEC 단독 모델은 PC2가 유의, OR 0.61~0.71, Table S5). 유의한 점수는 체성분(VAT·SAT·LAMA·NAMA·IMATA)에서 나옴</a:t>
             </a:r>
           </a:p>
           <a:p>
@@ -6414,7 +6403,7 @@
             </a:pPr>
             <a:r>
               <a:rPr lang="en-US" altLang="ko-KR" sz="1600" b="1" dirty="0">
-                <a:latin typeface="Malgun Gothic"/>
+                <a:latin typeface="KoPub돋움체 Medium" panose="00000600000000000000" pitchFamily="2" charset="-127"/>
               </a:rPr>
               <a:t>FPCA 점수는 곡선 모양의 변화량이라 개별 해석이 어려움(위치별 해석은 Figure 1)</a:t>
             </a:r>
@@ -8258,21 +8247,16 @@
             <p:ph idx="1"/>
           </p:nvPr>
         </p:nvSpPr>
-        <p:spPr>
-          <a:xfrm>
-            <a:ext cx="11176000" cy="1924000"/>
-          </a:xfrm>
-        </p:spPr>
+        <p:spPr/>
         <p:txBody>
           <a:bodyPr>
             <a:normAutofit/>
           </a:bodyPr>
           <a:lstStyle/>
           <a:p>
-            <a:pPr/>
             <a:r>
               <a:rPr lang="ko-KR" altLang="en-US" sz="1600" b="1" dirty="0">
-                <a:latin typeface="Malgun Gothic"/>
+                <a:latin typeface="KoPub돋움체 Medium" panose="00000600000000000000" pitchFamily="2" charset="-127"/>
               </a:rPr>
               <a:t>목적: 계수를 원래 곡선 위치(slice)로 되돌려, 어느 위치의 AEC가 질환에 기여하는지 확인</a:t>
             </a:r>
@@ -8282,7 +8266,7 @@
             <a:pPr lvl="1"/>
             <a:r>
               <a:rPr lang="ko-KR" altLang="en-US" sz="1600" dirty="0">
-                <a:latin typeface="Malgun Gothic"/>
+                <a:latin typeface="KoPub돋움체 Medium" panose="00000600000000000000" pitchFamily="2" charset="-127"/>
               </a:rPr>
               <a:t>읽는 법: 0보다 위 = 그 위치 AEC가 높을수록 질환 확률 ↑, 아래 = ↓</a:t>
             </a:r>
@@ -8292,7 +8276,7 @@
             <a:pPr lvl="1"/>
             <a:r>
               <a:rPr lang="ko-KR" altLang="en-US" sz="1600" dirty="0">
-                <a:latin typeface="Malgun Gothic"/>
+                <a:latin typeface="KoPub돋움체 Medium" panose="00000600000000000000" pitchFamily="2" charset="-127"/>
               </a:rPr>
               <a:t>세 질환 모두 간 쪽은 +, 치골 쪽은 -. 부호 전환 위치는 질환마다 다름(slice 55~80)</a:t>
             </a:r>
@@ -8302,7 +8286,7 @@
             <a:pPr lvl="1"/>
             <a:r>
               <a:rPr lang="ko-KR" altLang="en-US" sz="1600" dirty="0">
-                <a:latin typeface="Malgun Gothic"/>
+                <a:latin typeface="KoPub돋움체 Medium" panose="00000600000000000000" pitchFamily="2" charset="-127"/>
               </a:rPr>
               <a:t>한계: slice 번호가 환자 간 같은 해부학적 위치인지 미확인(가설 수준)</a:t>
             </a:r>
@@ -8766,7 +8750,7 @@
             <a:fld id="{9F4AF89A-28FA-47FA-B28F-9A9C6913CB7A}" type="slidenum">
               <a:rPr lang="ko-KR" altLang="en-US" smtClean="0"/>
               <a:pPr/>
-              <a:t>16</a:t>
+              <a:t>15</a:t>
             </a:fld>
             <a:endParaRPr lang="ko-KR" altLang="en-US" dirty="0"/>
           </a:p>
@@ -8781,7 +8765,7 @@
           <p:nvPr/>
         </p:nvPicPr>
         <p:blipFill>
-          <a:blip r:embed="rId5"/>
+          <a:blip r:embed="rId3"/>
           <a:stretch>
             <a:fillRect/>
           </a:stretch>
@@ -8805,7 +8789,7 @@
           <p:nvPr/>
         </p:nvPicPr>
         <p:blipFill>
-          <a:blip r:embed="rId6"/>
+          <a:blip r:embed="rId4"/>
           <a:stretch>
             <a:fillRect/>
           </a:stretch>
@@ -8906,7 +8890,7 @@
             <a:fld id="{9F4AF89A-28FA-47FA-B28F-9A9C6913CB7A}" type="slidenum">
               <a:rPr lang="ko-KR" altLang="en-US" smtClean="0"/>
               <a:pPr/>
-              <a:t>21</a:t>
+              <a:t>16</a:t>
             </a:fld>
             <a:endParaRPr lang="ko-KR" altLang="en-US" dirty="0"/>
           </a:p>
@@ -14907,7 +14891,7 @@
             <a:fld id="{9F4AF89A-28FA-47FA-B28F-9A9C6913CB7A}" type="slidenum">
               <a:rPr lang="ko-KR" altLang="en-US" smtClean="0"/>
               <a:pPr/>
-              <a:t>22</a:t>
+              <a:t>21</a:t>
             </a:fld>
             <a:endParaRPr lang="ko-KR" altLang="en-US" dirty="0"/>
           </a:p>
@@ -14932,28 +14916,29 @@
                 <a:tableStyleId>{C083E6E3-FA7D-4D7B-A595-EF9225AFEA82}</a:tableStyleId>
               </a:tblPr>
               <a:tblGrid>
-                <a:gridCol w="2793491">
+                <a:gridCol w="1900000">
                   <a:extLst>
                     <a:ext uri="{9D8B030D-6E8A-4147-A177-3AD203B41FA5}">
                       <a16:colId xmlns:a16="http://schemas.microsoft.com/office/drawing/2014/main" val="20000"/>
                     </a:ext>
                   </a:extLst>
                 </a:gridCol>
-                <a:gridCol w="2374467">
+                <a:gridCol w="1900000">
                   <a:extLst>
                     <a:ext uri="{9D8B030D-6E8A-4147-A177-3AD203B41FA5}">
                       <a16:colId xmlns:a16="http://schemas.microsoft.com/office/drawing/2014/main" val="20001"/>
                     </a:ext>
                   </a:extLst>
                 </a:gridCol>
-                <a:gridCol w="2409386">
+                <a:gridCol w="1700000">
                   <a:extLst>
                     <a:ext uri="{9D8B030D-6E8A-4147-A177-3AD203B41FA5}">
                       <a16:colId xmlns:a16="http://schemas.microsoft.com/office/drawing/2014/main" val="20002"/>
                     </a:ext>
                   </a:extLst>
                 </a:gridCol>
-                <a:gridCol w="2453034">
+                <a:gridCol w="3030378"/>
+                <a:gridCol w="1500000">
                   <a:extLst>
                     <a:ext uri="{9D8B030D-6E8A-4147-A177-3AD203B41FA5}">
                       <a16:colId xmlns:a16="http://schemas.microsoft.com/office/drawing/2014/main" val="20004"/>
@@ -15012,6 +14997,20 @@
                       <a:pPr algn="ctr"/>
                       <a:r>
                         <a:rPr sz="1200" b="1"/>
+                        <a:t>OR (95% CI)</a:t>
+                      </a:r>
+                    </a:p>
+                  </a:txBody>
+                  <a:tcPr anchor="ctr"/>
+                </a:tc>
+                <a:tc>
+                  <a:txBody>
+                    <a:bodyPr/>
+                    <a:lstStyle/>
+                    <a:p>
+                      <a:pPr algn="ctr"/>
+                      <a:r>
+                        <a:rPr sz="1200" b="1"/>
                         <a:t>p-value</a:t>
                       </a:r>
                     </a:p>
@@ -15075,6 +15074,20 @@
                       <a:pPr algn="ctr"/>
                       <a:r>
                         <a:rPr sz="1200" b="0"/>
+                        <a:t>1.39 (1.18–1.64)</a:t>
+                      </a:r>
+                    </a:p>
+                  </a:txBody>
+                  <a:tcPr anchor="ctr"/>
+                </a:tc>
+                <a:tc>
+                  <a:txBody>
+                    <a:bodyPr/>
+                    <a:lstStyle/>
+                    <a:p>
+                      <a:pPr algn="ctr"/>
+                      <a:r>
+                        <a:rPr sz="1200" b="0"/>
                         <a:t>&lt;0.001 *</a:t>
                       </a:r>
                     </a:p>
@@ -15134,6 +15147,20 @@
                       <a:pPr algn="ctr"/>
                       <a:r>
                         <a:rPr sz="1200" b="0"/>
+                        <a:t>0.64 (0.53–0.77)</a:t>
+                      </a:r>
+                    </a:p>
+                  </a:txBody>
+                  <a:tcPr anchor="ctr"/>
+                </a:tc>
+                <a:tc>
+                  <a:txBody>
+                    <a:bodyPr/>
+                    <a:lstStyle/>
+                    <a:p>
+                      <a:pPr algn="ctr"/>
+                      <a:r>
+                        <a:rPr sz="1200" b="0"/>
                         <a:t>&lt;0.001 *</a:t>
                       </a:r>
                     </a:p>
@@ -15193,6 +15220,20 @@
                       <a:pPr algn="ctr"/>
                       <a:r>
                         <a:rPr sz="1200" b="0"/>
+                        <a:t>1.05 (0.90–1.22)</a:t>
+                      </a:r>
+                    </a:p>
+                  </a:txBody>
+                  <a:tcPr anchor="ctr"/>
+                </a:tc>
+                <a:tc>
+                  <a:txBody>
+                    <a:bodyPr/>
+                    <a:lstStyle/>
+                    <a:p>
+                      <a:pPr algn="ctr"/>
+                      <a:r>
+                        <a:rPr sz="1200" b="0"/>
                         <a:t>0.537</a:t>
                       </a:r>
                     </a:p>
@@ -15256,6 +15297,20 @@
                       <a:pPr algn="ctr"/>
                       <a:r>
                         <a:rPr sz="1200" b="0"/>
+                        <a:t>1.09 (0.92–1.29)</a:t>
+                      </a:r>
+                    </a:p>
+                  </a:txBody>
+                  <a:tcPr anchor="ctr"/>
+                </a:tc>
+                <a:tc>
+                  <a:txBody>
+                    <a:bodyPr/>
+                    <a:lstStyle/>
+                    <a:p>
+                      <a:pPr algn="ctr"/>
+                      <a:r>
+                        <a:rPr sz="1200" b="0"/>
                         <a:t>0.326</a:t>
                       </a:r>
                     </a:p>
@@ -15315,6 +15370,20 @@
                       <a:pPr algn="ctr"/>
                       <a:r>
                         <a:rPr sz="1200" b="0"/>
+                        <a:t>0.61 (0.50–0.75)</a:t>
+                      </a:r>
+                    </a:p>
+                  </a:txBody>
+                  <a:tcPr anchor="ctr"/>
+                </a:tc>
+                <a:tc>
+                  <a:txBody>
+                    <a:bodyPr/>
+                    <a:lstStyle/>
+                    <a:p>
+                      <a:pPr algn="ctr"/>
+                      <a:r>
+                        <a:rPr sz="1200" b="0"/>
                         <a:t>&lt;0.001 *</a:t>
                       </a:r>
                     </a:p>
@@ -15374,6 +15443,20 @@
                       <a:pPr algn="ctr"/>
                       <a:r>
                         <a:rPr sz="1200" b="0"/>
+                        <a:t>1.15 (0.98–1.36)</a:t>
+                      </a:r>
+                    </a:p>
+                  </a:txBody>
+                  <a:tcPr anchor="ctr"/>
+                </a:tc>
+                <a:tc>
+                  <a:txBody>
+                    <a:bodyPr/>
+                    <a:lstStyle/>
+                    <a:p>
+                      <a:pPr algn="ctr"/>
+                      <a:r>
+                        <a:rPr sz="1200" b="0"/>
                         <a:t>0.087</a:t>
                       </a:r>
                     </a:p>
@@ -15437,6 +15520,20 @@
                       <a:pPr algn="ctr"/>
                       <a:r>
                         <a:rPr sz="1200" b="0"/>
+                        <a:t>1.12 (0.89–1.41)</a:t>
+                      </a:r>
+                    </a:p>
+                  </a:txBody>
+                  <a:tcPr anchor="ctr"/>
+                </a:tc>
+                <a:tc>
+                  <a:txBody>
+                    <a:bodyPr/>
+                    <a:lstStyle/>
+                    <a:p>
+                      <a:pPr algn="ctr"/>
+                      <a:r>
+                        <a:rPr sz="1200" b="0"/>
                         <a:t>0.334</a:t>
                       </a:r>
                     </a:p>
@@ -15496,6 +15593,20 @@
                       <a:pPr algn="ctr"/>
                       <a:r>
                         <a:rPr sz="1200" b="0"/>
+                        <a:t>0.71 (0.54–0.94)</a:t>
+                      </a:r>
+                    </a:p>
+                  </a:txBody>
+                  <a:tcPr anchor="ctr"/>
+                </a:tc>
+                <a:tc>
+                  <a:txBody>
+                    <a:bodyPr/>
+                    <a:lstStyle/>
+                    <a:p>
+                      <a:pPr algn="ctr"/>
+                      <a:r>
+                        <a:rPr sz="1200" b="0"/>
                         <a:t>0.015 *</a:t>
                       </a:r>
                     </a:p>
@@ -15542,6 +15653,20 @@
                       <a:r>
                         <a:rPr sz="1200" b="0"/>
                         <a:t>-0.101</a:t>
+                      </a:r>
+                    </a:p>
+                  </a:txBody>
+                  <a:tcPr anchor="ctr"/>
+                </a:tc>
+                <a:tc>
+                  <a:txBody>
+                    <a:bodyPr/>
+                    <a:lstStyle/>
+                    <a:p>
+                      <a:pPr algn="ctr"/>
+                      <a:r>
+                        <a:rPr sz="1200" b="0"/>
+                        <a:t>0.90 (0.73–1.12)</a:t>
                       </a:r>
                     </a:p>
                   </a:txBody>
@@ -15657,7 +15782,7 @@
             <a:fld id="{9F4AF89A-28FA-47FA-B28F-9A9C6913CB7A}" type="slidenum">
               <a:rPr lang="ko-KR" altLang="en-US" smtClean="0"/>
               <a:pPr/>
-              <a:t>24</a:t>
+              <a:t>22</a:t>
             </a:fld>
             <a:endParaRPr lang="ko-KR" altLang="en-US" dirty="0"/>
           </a:p>
@@ -18649,21 +18774,16 @@
             <p:ph idx="1"/>
           </p:nvPr>
         </p:nvSpPr>
-        <p:spPr>
-          <a:xfrm>
-            <a:ext cx="11176000" cy="1134400"/>
-          </a:xfrm>
-        </p:spPr>
+        <p:spPr/>
         <p:txBody>
           <a:bodyPr>
             <a:normAutofit/>
           </a:bodyPr>
           <a:lstStyle/>
           <a:p>
-            <a:pPr/>
             <a:r>
               <a:rPr lang="ko-KR" altLang="en-US" sz="1600" b="1" dirty="0">
-                <a:latin typeface="Malgun Gothic"/>
+                <a:latin typeface="KoPub돋움체 Medium" panose="00000600000000000000" pitchFamily="2" charset="-127"/>
               </a:rPr>
               <a:t>고혈압: Internal·External 모두 유의하게 개선</a:t>
             </a:r>
@@ -18673,15 +18793,25 @@
             <a:pPr lvl="1"/>
             <a:r>
               <a:rPr lang="ko-KR" altLang="en-US" sz="1600" dirty="0" err="1">
-                <a:latin typeface="Malgun Gothic"/>
+                <a:latin typeface="KoPub돋움체 Medium" panose="00000600000000000000" pitchFamily="2" charset="-127"/>
               </a:rPr>
               <a:t>Internal</a:t>
             </a:r>
             <a:r>
               <a:rPr lang="ko-KR" altLang="en-US" sz="1600" dirty="0">
-                <a:latin typeface="Malgun Gothic"/>
+                <a:latin typeface="KoPub돋움체 Medium" panose="00000600000000000000" pitchFamily="2" charset="-127"/>
               </a:rPr>
               <a:t> 0.795 → 0.809 (p=0.035), External 0.718 → 0.741 (p=0.011)</a:t>
+            </a:r>
+            <a:endParaRPr lang="ko-KR" altLang="en-US" dirty="0"/>
+          </a:p>
+          <a:p>
+            <a:pPr lvl="1"/>
+            <a:r>
+              <a:rPr lang="ko-KR" altLang="en-US" sz="1600" dirty="0">
+                <a:latin typeface="KoPub돋움체 Medium" panose="00000600000000000000" pitchFamily="2" charset="-127"/>
+              </a:rPr>
+              <a:t>Feature 추가 시 AUC 상승 (Baseline → +AEC → +AEC+체성분): Internal 0.796 → 0.805 → 0.811, External 0.718 → 0.730 → 0.741</a:t>
             </a:r>
             <a:endParaRPr lang="ko-KR" altLang="en-US" dirty="0"/>
           </a:p>
@@ -20597,51 +20727,46 @@
             <p:ph idx="1"/>
           </p:nvPr>
         </p:nvSpPr>
-        <p:spPr>
-          <a:xfrm>
-            <a:ext cx="11176000" cy="1134400"/>
-          </a:xfrm>
-        </p:spPr>
+        <p:spPr/>
         <p:txBody>
           <a:bodyPr>
             <a:normAutofit/>
           </a:bodyPr>
           <a:lstStyle/>
           <a:p>
-            <a:pPr/>
             <a:r>
               <a:rPr lang="ko-KR" altLang="en-US" sz="1600" b="1" dirty="0">
-                <a:latin typeface="Malgun Gothic"/>
+                <a:latin typeface="KoPub돋움체 Medium" panose="00000600000000000000" pitchFamily="2" charset="-127"/>
               </a:rPr>
               <a:t>당뇨병: </a:t>
             </a:r>
             <a:r>
               <a:rPr lang="ko-KR" altLang="en-US" sz="1600" b="1" dirty="0" err="1">
-                <a:latin typeface="Malgun Gothic"/>
+                <a:latin typeface="KoPub돋움체 Medium" panose="00000600000000000000" pitchFamily="2" charset="-127"/>
               </a:rPr>
               <a:t>Internal</a:t>
             </a:r>
             <a:r>
               <a:rPr lang="ko-KR" altLang="en-US" sz="1600" b="1" dirty="0">
-                <a:latin typeface="Malgun Gothic"/>
+                <a:latin typeface="KoPub돋움체 Medium" panose="00000600000000000000" pitchFamily="2" charset="-127"/>
               </a:rPr>
               <a:t> 비유의</a:t>
             </a:r>
             <a:r>
               <a:rPr lang="en-US" altLang="ko-KR" sz="1600" b="1" dirty="0">
-                <a:latin typeface="Malgun Gothic"/>
+                <a:latin typeface="KoPub돋움체 Medium" panose="00000600000000000000" pitchFamily="2" charset="-127"/>
               </a:rPr>
               <a:t>, </a:t>
             </a:r>
             <a:r>
               <a:rPr lang="ko-KR" altLang="en-US" sz="1600" b="1" dirty="0" err="1">
-                <a:latin typeface="Malgun Gothic"/>
+                <a:latin typeface="KoPub돋움체 Medium" panose="00000600000000000000" pitchFamily="2" charset="-127"/>
               </a:rPr>
               <a:t>External</a:t>
             </a:r>
             <a:r>
               <a:rPr lang="ko-KR" altLang="en-US" sz="1600" b="1" dirty="0">
-                <a:latin typeface="Malgun Gothic"/>
+                <a:latin typeface="KoPub돋움체 Medium" panose="00000600000000000000" pitchFamily="2" charset="-127"/>
               </a:rPr>
               <a:t> 유의</a:t>
             </a:r>
@@ -20651,15 +20776,25 @@
             <a:pPr lvl="1"/>
             <a:r>
               <a:rPr lang="ko-KR" altLang="en-US" sz="1600" dirty="0" err="1">
-                <a:latin typeface="Malgun Gothic"/>
+                <a:latin typeface="KoPub돋움체 Medium" panose="00000600000000000000" pitchFamily="2" charset="-127"/>
               </a:rPr>
               <a:t>Internal</a:t>
             </a:r>
             <a:r>
               <a:rPr lang="ko-KR" altLang="en-US" sz="1600" dirty="0">
-                <a:latin typeface="Malgun Gothic"/>
+                <a:latin typeface="KoPub돋움체 Medium" panose="00000600000000000000" pitchFamily="2" charset="-127"/>
               </a:rPr>
               <a:t> 0.714 → 0.735 (p=0.078), External 0.665 → 0.706 (p&lt;0.001)</a:t>
+            </a:r>
+            <a:endParaRPr lang="ko-KR" altLang="en-US" dirty="0"/>
+          </a:p>
+          <a:p>
+            <a:pPr lvl="1"/>
+            <a:r>
+              <a:rPr lang="ko-KR" altLang="en-US" sz="1600" dirty="0">
+                <a:latin typeface="KoPub돋움체 Medium" panose="00000600000000000000" pitchFamily="2" charset="-127"/>
+              </a:rPr>
+              <a:t>Feature 추가 시 AUC 상승 (Baseline → +AEC → +AEC+체성분): Internal 0.712 → 0.732 → 0.736, External 0.665 → 0.674 → 0.706</a:t>
             </a:r>
             <a:endParaRPr lang="ko-KR" altLang="en-US" dirty="0"/>
           </a:p>
@@ -22575,51 +22710,46 @@
             <p:ph idx="1"/>
           </p:nvPr>
         </p:nvSpPr>
-        <p:spPr>
-          <a:xfrm>
-            <a:ext cx="11176000" cy="1134400"/>
-          </a:xfrm>
-        </p:spPr>
+        <p:spPr/>
         <p:txBody>
           <a:bodyPr>
             <a:normAutofit/>
           </a:bodyPr>
           <a:lstStyle/>
           <a:p>
-            <a:pPr/>
             <a:r>
               <a:rPr lang="ko-KR" altLang="en-US" sz="1600" b="1" dirty="0">
-                <a:latin typeface="Malgun Gothic"/>
+                <a:latin typeface="KoPub돋움체 Medium" panose="00000600000000000000" pitchFamily="2" charset="-127"/>
               </a:rPr>
               <a:t>만성신장질환: </a:t>
             </a:r>
             <a:r>
               <a:rPr lang="ko-KR" altLang="en-US" sz="1600" b="1" dirty="0" err="1">
-                <a:latin typeface="Malgun Gothic"/>
+                <a:latin typeface="KoPub돋움체 Medium" panose="00000600000000000000" pitchFamily="2" charset="-127"/>
               </a:rPr>
               <a:t>Internal</a:t>
             </a:r>
             <a:r>
               <a:rPr lang="ko-KR" altLang="en-US" sz="1600" b="1" dirty="0">
-                <a:latin typeface="Malgun Gothic"/>
+                <a:latin typeface="KoPub돋움체 Medium" panose="00000600000000000000" pitchFamily="2" charset="-127"/>
               </a:rPr>
               <a:t> 비유의</a:t>
             </a:r>
             <a:r>
               <a:rPr lang="en-US" altLang="ko-KR" sz="1600" b="1" dirty="0">
-                <a:latin typeface="Malgun Gothic"/>
+                <a:latin typeface="KoPub돋움체 Medium" panose="00000600000000000000" pitchFamily="2" charset="-127"/>
               </a:rPr>
               <a:t>, </a:t>
             </a:r>
             <a:r>
               <a:rPr lang="ko-KR" altLang="en-US" sz="1600" b="1" dirty="0" err="1">
-                <a:latin typeface="Malgun Gothic"/>
+                <a:latin typeface="KoPub돋움체 Medium" panose="00000600000000000000" pitchFamily="2" charset="-127"/>
               </a:rPr>
               <a:t>External</a:t>
             </a:r>
             <a:r>
               <a:rPr lang="ko-KR" altLang="en-US" sz="1600" b="1" dirty="0">
-                <a:latin typeface="Malgun Gothic"/>
+                <a:latin typeface="KoPub돋움체 Medium" panose="00000600000000000000" pitchFamily="2" charset="-127"/>
               </a:rPr>
               <a:t> 유의</a:t>
             </a:r>
@@ -22628,15 +22758,24 @@
             <a:pPr lvl="1"/>
             <a:r>
               <a:rPr lang="ko-KR" altLang="en-US" sz="1600" dirty="0" err="1">
-                <a:latin typeface="Malgun Gothic"/>
+                <a:latin typeface="KoPub돋움체 Medium" panose="00000600000000000000" pitchFamily="2" charset="-127"/>
               </a:rPr>
               <a:t>Internal</a:t>
             </a:r>
             <a:r>
               <a:rPr lang="ko-KR" altLang="en-US" sz="1600" dirty="0">
-                <a:latin typeface="Malgun Gothic"/>
+                <a:latin typeface="KoPub돋움체 Medium" panose="00000600000000000000" pitchFamily="2" charset="-127"/>
               </a:rPr>
               <a:t> 0.769 → 0.784 (p=0.39), External 0.615 → 0.681 (p&lt;0.001)</a:t>
+            </a:r>
+          </a:p>
+          <a:p>
+            <a:pPr lvl="1"/>
+            <a:r>
+              <a:rPr lang="ko-KR" altLang="en-US" sz="1600" dirty="0">
+                <a:latin typeface="KoPub돋움체 Medium" panose="00000600000000000000" pitchFamily="2" charset="-127"/>
+              </a:rPr>
+              <a:t>Feature 추가 시 AUC 상승 (Baseline → +AEC → +AEC+체성분): Internal 0.770 → 0.754 → 0.784 (+AEC만 하락), External 0.615 → 0.643 → 0.681</a:t>
             </a:r>
           </a:p>
         </p:txBody>
@@ -24798,11 +24937,7 @@
             <p:ph idx="1"/>
           </p:nvPr>
         </p:nvSpPr>
-        <p:spPr>
-          <a:xfrm>
-            <a:ext cx="11176000" cy="533198"/>
-          </a:xfrm>
-        </p:spPr>
+        <p:spPr/>
         <p:txBody>
           <a:bodyPr>
             <a:normAutofit/>
@@ -24811,7 +24946,7 @@
           <a:p>
             <a:r>
               <a:rPr lang="en-US" altLang="ko-KR" sz="1600" b="1" dirty="0">
-                <a:latin typeface="Malgun Gothic"/>
+                <a:latin typeface="KoPub돋움체 Medium" panose="00000600000000000000" pitchFamily="2" charset="-127"/>
               </a:rPr>
               <a:t>AEC·체성분 추가 후 성별·나이는 대체로 유의, 키·몸무게는 대부분 비유의</a:t>
             </a:r>
